--- a/assets/pptx/catalog-424.pptx
+++ b/assets/pptx/catalog-424.pptx
@@ -3315,7 +3315,7 @@
                 <a:ea typeface="Ebrima"/>
                 <a:cs typeface="Ebrima"/>
               </a:rPr>
-              <a:t>እኔ የምሻው በረከት (ኦ)</a:t>
+              <a:t>እኔ የምሻው በረከት ኦ</a:t>
             </a:r>
           </a:p>
           <a:p>
@@ -3333,7 +3333,7 @@
                 <a:ea typeface="Ebrima"/>
                 <a:cs typeface="Ebrima"/>
               </a:rPr>
-              <a:t>የውስጥ የልቤ ጥማት (አ)</a:t>
+              <a:t>የውስጥ የልቤ ጥማት አ</a:t>
             </a:r>
           </a:p>
           <a:p>
@@ -3459,7 +3459,7 @@
                 <a:ea typeface="Ebrima"/>
                 <a:cs typeface="Ebrima"/>
               </a:rPr>
-              <a:t>እኔ የምሻው በረከት (ኦ)</a:t>
+              <a:t>እኔ የምሻው በረከት ኦ</a:t>
             </a:r>
           </a:p>
           <a:p>
@@ -3477,7 +3477,7 @@
                 <a:ea typeface="Ebrima"/>
                 <a:cs typeface="Ebrima"/>
               </a:rPr>
-              <a:t>የውስጥ የልቤ ጥማት (አዋ)</a:t>
+              <a:t>የውስጥ የልቤ ጥማት አዋ</a:t>
             </a:r>
           </a:p>
           <a:p>
